--- a/evaluation/dashboard/public/decks/uxl-performance-validation-maintainer-briefing.pptx
+++ b/evaluation/dashboard/public/decks/uxl-performance-validation-maintainer-briefing.pptx
@@ -2,20 +2,19 @@
 <file path=ppt/presentation.xml><?xml version="1.0" encoding="utf-8"?>
 <p:presentation xmlns:p="http://schemas.openxmlformats.org/presentationml/2006/main">
   <p:sldMasterIdLst>
-    <p:sldMasterId xmlns:r="http://schemas.openxmlformats.org/officeDocument/2006/relationships" id="2147483648" r:id="R6389427b5f004630"/>
-    <p:sldMasterId xmlns:r="http://schemas.openxmlformats.org/officeDocument/2006/relationships" id="2147483665" r:id="Rc4dc829a7e8e419f"/>
+    <p:sldMasterId xmlns:r="http://schemas.openxmlformats.org/officeDocument/2006/relationships" id="2147483648" r:id="R6cec4d78472c48ce"/>
+    <p:sldMasterId xmlns:r="http://schemas.openxmlformats.org/officeDocument/2006/relationships" id="2147483665" r:id="R6cd37fa2503946d6"/>
   </p:sldMasterIdLst>
   <p:notesMasterIdLst>
-    <p:notesMasterId xmlns:r="http://schemas.openxmlformats.org/officeDocument/2006/relationships" r:id="R663299d32d15415b"/>
+    <p:notesMasterId xmlns:r="http://schemas.openxmlformats.org/officeDocument/2006/relationships" r:id="Re95bcf66c5ee4803"/>
   </p:notesMasterIdLst>
   <p:sldIdLst>
-    <p:sldId xmlns:r="http://schemas.openxmlformats.org/officeDocument/2006/relationships" id="256" r:id="Re3ef97cba3c94268"/>
-    <p:sldId xmlns:r="http://schemas.openxmlformats.org/officeDocument/2006/relationships" id="257" r:id="R9d18aae8f23a4f79"/>
-    <p:sldId xmlns:r="http://schemas.openxmlformats.org/officeDocument/2006/relationships" id="258" r:id="Rd06a6d31f77a4c83"/>
-    <p:sldId xmlns:r="http://schemas.openxmlformats.org/officeDocument/2006/relationships" id="259" r:id="R3f2e73476a3749c2"/>
-    <p:sldId xmlns:r="http://schemas.openxmlformats.org/officeDocument/2006/relationships" id="260" r:id="Reea45e40adfe4469"/>
-    <p:sldId xmlns:r="http://schemas.openxmlformats.org/officeDocument/2006/relationships" id="261" r:id="Re1acb5b31f86452f"/>
-    <p:sldId xmlns:r="http://schemas.openxmlformats.org/officeDocument/2006/relationships" id="262" r:id="R3264a9f0cf7a4c31"/>
+    <p:sldId xmlns:r="http://schemas.openxmlformats.org/officeDocument/2006/relationships" id="256" r:id="Rc4b5ce1472eb443c"/>
+    <p:sldId xmlns:r="http://schemas.openxmlformats.org/officeDocument/2006/relationships" id="257" r:id="R767987d457684969"/>
+    <p:sldId xmlns:r="http://schemas.openxmlformats.org/officeDocument/2006/relationships" id="258" r:id="Rb01dc0b9db674b0f"/>
+    <p:sldId xmlns:r="http://schemas.openxmlformats.org/officeDocument/2006/relationships" id="259" r:id="R91d0f48f25174529"/>
+    <p:sldId xmlns:r="http://schemas.openxmlformats.org/officeDocument/2006/relationships" id="260" r:id="Ref662cb50eaf48f9"/>
+    <p:sldId xmlns:r="http://schemas.openxmlformats.org/officeDocument/2006/relationships" id="261" r:id="R805843fd6879411b"/>
   </p:sldIdLst>
   <p:sldSz cx="12192000" cy="6858000"/>
   <p:notesSz cx="6858000" cy="9144000"/>
@@ -629,7 +628,7 @@
           </a:p>
           <a:p xmlns:a="http://schemas.openxmlformats.org/drawingml/2006/main">
             <a:r>
-              <a:t>Speaker cue: Why this is useful across UXL projects</a:t>
+              <a:t>Speaker cue: What the skill tells an agent today</a:t>
             </a:r>
           </a:p>
         </p:txBody>
@@ -739,7 +738,7 @@
           </a:p>
           <a:p xmlns:a="http://schemas.openxmlformats.org/drawingml/2006/main">
             <a:r>
-              <a:t>Speaker cue: What the skill tells an agent today</a:t>
+              <a:t>Speaker cue: Evaluation inventory: 4 implemented, 2 target gaps</a:t>
             </a:r>
           </a:p>
         </p:txBody>
@@ -849,7 +848,7 @@
           </a:p>
           <a:p xmlns:a="http://schemas.openxmlformats.org/drawingml/2006/main">
             <a:r>
-              <a:t>Speaker cue: Evaluation inventory: 4 implemented, 2 target gaps</a:t>
+              <a:t>Speaker cue: How we chose the content</a:t>
             </a:r>
           </a:p>
         </p:txBody>
@@ -959,7 +958,7 @@
           </a:p>
           <a:p xmlns:a="http://schemas.openxmlformats.org/drawingml/2006/main">
             <a:r>
-              <a:t>Speaker cue: How we chose the content</a:t>
+              <a:t>Speaker cue: What shared ownership would look like</a:t>
             </a:r>
           </a:p>
         </p:txBody>
@@ -990,116 +989,6 @@
 </file>
 
 <file path=ppt/notesSlides/notesSlide6.xml><?xml version="1.0" encoding="utf-8"?>
-<p:notes xmlns:p="http://schemas.openxmlformats.org/presentationml/2006/main">
-  <p:cSld>
-    <p:spTree>
-      <p:nvGrpSpPr>
-        <p:cNvPr id="1" name=""/>
-        <p:cNvGrpSpPr/>
-        <p:nvPr/>
-      </p:nvGrpSpPr>
-      <p:grpSpPr>
-        <a:xfrm xmlns:a="http://schemas.openxmlformats.org/drawingml/2006/main"/>
-      </p:grpSpPr>
-      <p:sp>
-        <p:nvSpPr>
-          <p:cNvPr id="2" name="Slide Image Placeholder 1"/>
-          <p:cNvSpPr>
-            <a:spLocks xmlns:a="http://schemas.openxmlformats.org/drawingml/2006/main" noGrp="1"/>
-          </p:cNvSpPr>
-          <p:nvPr>
-            <p:ph type="sldImg" idx="0"/>
-          </p:nvPr>
-        </p:nvSpPr>
-        <p:spPr/>
-      </p:sp>
-      <p:sp>
-        <p:nvSpPr>
-          <p:cNvPr id="3" name="Notes Placeholder 2"/>
-          <p:cNvSpPr>
-            <a:spLocks xmlns:a="http://schemas.openxmlformats.org/drawingml/2006/main" noGrp="1"/>
-          </p:cNvSpPr>
-          <p:nvPr>
-            <p:ph type="body" idx="1"/>
-          </p:nvPr>
-        </p:nvSpPr>
-        <p:spPr/>
-        <p:txBody>
-          <a:bodyPr xmlns:a="http://schemas.openxmlformats.org/drawingml/2006/main"/>
-          <a:lstStyle xmlns:a="http://schemas.openxmlformats.org/drawingml/2006/main"/>
-          <a:p xmlns:a="http://schemas.openxmlformats.org/drawingml/2006/main">
-            <a:r>
-              <a:t>[Sources]</a:t>
-            </a:r>
-          </a:p>
-          <a:p xmlns:a="http://schemas.openxmlformats.org/drawingml/2006/main">
-            <a:r>
-              <a:t>- https://github.com/uxlfoundation/skills/tree/main/skills/uxl-performance-validation</a:t>
-            </a:r>
-          </a:p>
-          <a:p xmlns:a="http://schemas.openxmlformats.org/drawingml/2006/main">
-            <a:r>
-              <a:t>- https://github.com/uxlfoundation/skills/blob/main/skill-cards/uxl-performance-validation.md</a:t>
-            </a:r>
-          </a:p>
-          <a:p xmlns:a="http://schemas.openxmlformats.org/drawingml/2006/main">
-            <a:r>
-              <a:t>- https://github.com/uxlfoundation/skills/blob/main/docs/maintainer-review/uxl-performance-validation.md</a:t>
-            </a:r>
-          </a:p>
-          <a:p xmlns:a="http://schemas.openxmlformats.org/drawingml/2006/main">
-            <a:r>
-              <a:t>- https://github.com/uxlfoundation/skills/blob/main/evaluation/harbor/suites.json</a:t>
-            </a:r>
-          </a:p>
-          <a:p xmlns:a="http://schemas.openxmlformats.org/drawingml/2006/main">
-            <a:r>
-              <a:t>- https://github.com/uxlfoundation/skills/blob/main/evaluation/harbor/EVALUATOR_POLICY.md</a:t>
-            </a:r>
-          </a:p>
-          <a:p xmlns:a="http://schemas.openxmlformats.org/drawingml/2006/main">
-            <a:r>
-              <a:t>[/Sources]</a:t>
-            </a:r>
-          </a:p>
-          <a:p xmlns:a="http://schemas.openxmlformats.org/drawingml/2006/main">
-            <a:r>
-              <a:t/>
-            </a:r>
-          </a:p>
-          <a:p xmlns:a="http://schemas.openxmlformats.org/drawingml/2006/main">
-            <a:r>
-              <a:t>Speaker cue: What shared ownership would look like</a:t>
-            </a:r>
-          </a:p>
-        </p:txBody>
-      </p:sp>
-      <p:sp>
-        <p:nvSpPr>
-          <p:cNvPr id="4" name="Slide Number Placeholder 3"/>
-          <p:cNvSpPr>
-            <a:spLocks xmlns:a="http://schemas.openxmlformats.org/drawingml/2006/main" noGrp="1"/>
-          </p:cNvSpPr>
-          <p:nvPr>
-            <p:ph type="sldNum" idx="5"/>
-          </p:nvPr>
-        </p:nvSpPr>
-        <p:spPr/>
-        <p:txBody>
-          <a:bodyPr xmlns:a="http://schemas.openxmlformats.org/drawingml/2006/main"/>
-          <a:lstStyle xmlns:a="http://schemas.openxmlformats.org/drawingml/2006/main"/>
-          <a:p xmlns:a="http://schemas.openxmlformats.org/drawingml/2006/main"/>
-        </p:txBody>
-      </p:sp>
-    </p:spTree>
-  </p:cSld>
-  <p:clrMapOvr>
-    <a:masterClrMapping xmlns:a="http://schemas.openxmlformats.org/drawingml/2006/main"/>
-  </p:clrMapOvr>
-</p:notes>
-</file>
-
-<file path=ppt/notesSlides/notesSlide7.xml><?xml version="1.0" encoding="utf-8"?>
 <p:notes xmlns:p="http://schemas.openxmlformats.org/presentationml/2006/main">
   <p:cSld>
     <p:spTree>
@@ -1215,7 +1104,7 @@
     <p:bg>
       <p:bgPr>
         <a:blipFill xmlns:a="http://schemas.openxmlformats.org/drawingml/2006/main">
-          <a:blip xmlns:r="http://schemas.openxmlformats.org/officeDocument/2006/relationships" r:embed="R0be656406eb643f9">
+          <a:blip xmlns:r="http://schemas.openxmlformats.org/officeDocument/2006/relationships" r:embed="Rebfc6800060e45ff">
             <a:alphaModFix/>
           </a:blip>
           <a:stretch>
@@ -1650,7 +1539,7 @@
           <p:nvPr/>
         </p:nvPicPr>
         <p:blipFill rotWithShape="1">
-          <a:blip xmlns:r="http://schemas.openxmlformats.org/officeDocument/2006/relationships" xmlns:a="http://schemas.openxmlformats.org/drawingml/2006/main" r:embed="R8d98ed0685a44546">
+          <a:blip xmlns:r="http://schemas.openxmlformats.org/officeDocument/2006/relationships" xmlns:a="http://schemas.openxmlformats.org/drawingml/2006/main" r:embed="Ra35fd38994db4f04">
             <a:alphaModFix/>
           </a:blip>
           <a:srcRect xmlns:a="http://schemas.openxmlformats.org/drawingml/2006/main" l="0" t="0" r="0" b="0"/>
@@ -1680,7 +1569,7 @@
     <p:bg>
       <p:bgPr>
         <a:blipFill xmlns:a="http://schemas.openxmlformats.org/drawingml/2006/main">
-          <a:blip xmlns:r="http://schemas.openxmlformats.org/officeDocument/2006/relationships" r:embed="R0e73742da1364452">
+          <a:blip xmlns:r="http://schemas.openxmlformats.org/officeDocument/2006/relationships" r:embed="R826b4208726f4e62">
             <a:alphaModFix/>
           </a:blip>
           <a:stretch>
@@ -2714,7 +2603,7 @@
           <p:nvPr/>
         </p:nvPicPr>
         <p:blipFill rotWithShape="1">
-          <a:blip xmlns:r="http://schemas.openxmlformats.org/officeDocument/2006/relationships" xmlns:a="http://schemas.openxmlformats.org/drawingml/2006/main" r:embed="Rb6d90d693649461a">
+          <a:blip xmlns:r="http://schemas.openxmlformats.org/officeDocument/2006/relationships" xmlns:a="http://schemas.openxmlformats.org/drawingml/2006/main" r:embed="Rcf45004576974d08">
             <a:alphaModFix/>
           </a:blip>
           <a:srcRect xmlns:a="http://schemas.openxmlformats.org/drawingml/2006/main" l="0" t="0" r="0" b="0"/>
@@ -3738,7 +3627,7 @@
           <p:nvPr/>
         </p:nvPicPr>
         <p:blipFill rotWithShape="1">
-          <a:blip xmlns:r="http://schemas.openxmlformats.org/officeDocument/2006/relationships" xmlns:a="http://schemas.openxmlformats.org/drawingml/2006/main" r:embed="R4152914fd07c4bde">
+          <a:blip xmlns:r="http://schemas.openxmlformats.org/officeDocument/2006/relationships" xmlns:a="http://schemas.openxmlformats.org/drawingml/2006/main" r:embed="Ra11fa2b0caf3447a">
             <a:alphaModFix/>
           </a:blip>
           <a:srcRect xmlns:a="http://schemas.openxmlformats.org/drawingml/2006/main" l="0" t="0" r="0" b="0"/>
@@ -3768,7 +3657,7 @@
     <p:bg>
       <p:bgPr>
         <a:blipFill xmlns:a="http://schemas.openxmlformats.org/drawingml/2006/main">
-          <a:blip xmlns:r="http://schemas.openxmlformats.org/officeDocument/2006/relationships" r:embed="R30d03040476d4181">
+          <a:blip xmlns:r="http://schemas.openxmlformats.org/officeDocument/2006/relationships" r:embed="Raeecc6301de6478d">
             <a:alphaModFix/>
           </a:blip>
           <a:stretch>
@@ -5042,7 +4931,7 @@
           <p:nvPr/>
         </p:nvPicPr>
         <p:blipFill rotWithShape="1">
-          <a:blip xmlns:r="http://schemas.openxmlformats.org/officeDocument/2006/relationships" xmlns:a="http://schemas.openxmlformats.org/drawingml/2006/main" r:embed="R351aa63171474e2d">
+          <a:blip xmlns:r="http://schemas.openxmlformats.org/officeDocument/2006/relationships" xmlns:a="http://schemas.openxmlformats.org/drawingml/2006/main" r:embed="R9753bee2c9074b41">
             <a:alphaModFix/>
           </a:blip>
           <a:srcRect xmlns:a="http://schemas.openxmlformats.org/drawingml/2006/main" l="0" t="0" r="0" b="0"/>
@@ -8286,7 +8175,7 @@
           <p:nvPr/>
         </p:nvPicPr>
         <p:blipFill rotWithShape="1">
-          <a:blip xmlns:r="http://schemas.openxmlformats.org/officeDocument/2006/relationships" xmlns:a="http://schemas.openxmlformats.org/drawingml/2006/main" r:embed="R262278eeeef04c20">
+          <a:blip xmlns:r="http://schemas.openxmlformats.org/officeDocument/2006/relationships" xmlns:a="http://schemas.openxmlformats.org/drawingml/2006/main" r:embed="Ra827efc87a314ea4">
             <a:alphaModFix/>
           </a:blip>
           <a:srcRect xmlns:a="http://schemas.openxmlformats.org/drawingml/2006/main" l="0" t="0" r="0" b="0"/>
@@ -10024,7 +9913,7 @@
           <p:nvPr/>
         </p:nvPicPr>
         <p:blipFill rotWithShape="1">
-          <a:blip xmlns:r="http://schemas.openxmlformats.org/officeDocument/2006/relationships" xmlns:a="http://schemas.openxmlformats.org/drawingml/2006/main" r:embed="Ra203d11013574ecc">
+          <a:blip xmlns:r="http://schemas.openxmlformats.org/officeDocument/2006/relationships" xmlns:a="http://schemas.openxmlformats.org/drawingml/2006/main" r:embed="Ra68211a7941742c3">
             <a:alphaModFix/>
           </a:blip>
           <a:srcRect xmlns:a="http://schemas.openxmlformats.org/drawingml/2006/main" l="0" t="0" r="0" b="0"/>
@@ -16853,7 +16742,7 @@
     <p:bg>
       <p:bgPr>
         <a:blipFill xmlns:a="http://schemas.openxmlformats.org/drawingml/2006/main">
-          <a:blip xmlns:r="http://schemas.openxmlformats.org/officeDocument/2006/relationships" r:embed="R131b50c80758468a">
+          <a:blip xmlns:r="http://schemas.openxmlformats.org/officeDocument/2006/relationships" r:embed="R210492bfee494f94">
             <a:alphaModFix/>
           </a:blip>
           <a:stretch>
@@ -17288,7 +17177,7 @@
           <p:nvPr/>
         </p:nvPicPr>
         <p:blipFill rotWithShape="1">
-          <a:blip xmlns:r="http://schemas.openxmlformats.org/officeDocument/2006/relationships" xmlns:a="http://schemas.openxmlformats.org/drawingml/2006/main" r:embed="Rddab8b80d33a4b78">
+          <a:blip xmlns:r="http://schemas.openxmlformats.org/officeDocument/2006/relationships" xmlns:a="http://schemas.openxmlformats.org/drawingml/2006/main" r:embed="Rb1b90555d83b46aa">
             <a:alphaModFix/>
           </a:blip>
           <a:srcRect xmlns:a="http://schemas.openxmlformats.org/drawingml/2006/main" l="0" t="0" r="0" b="0"/>
@@ -17318,7 +17207,7 @@
     <p:bg>
       <p:bgPr>
         <a:blipFill xmlns:a="http://schemas.openxmlformats.org/drawingml/2006/main">
-          <a:blip xmlns:r="http://schemas.openxmlformats.org/officeDocument/2006/relationships" r:embed="R7180f2d51f7b4dab">
+          <a:blip xmlns:r="http://schemas.openxmlformats.org/officeDocument/2006/relationships" r:embed="Rb113f55924ff4c7e">
             <a:alphaModFix/>
           </a:blip>
           <a:stretch>
@@ -17951,7 +17840,7 @@
           <p:nvPr/>
         </p:nvPicPr>
         <p:blipFill rotWithShape="1">
-          <a:blip xmlns:r="http://schemas.openxmlformats.org/officeDocument/2006/relationships" xmlns:a="http://schemas.openxmlformats.org/drawingml/2006/main" r:embed="R9246dcd2e3c4435a">
+          <a:blip xmlns:r="http://schemas.openxmlformats.org/officeDocument/2006/relationships" xmlns:a="http://schemas.openxmlformats.org/drawingml/2006/main" r:embed="R0fec7f323de64d44">
             <a:alphaModFix/>
           </a:blip>
           <a:srcRect xmlns:a="http://schemas.openxmlformats.org/drawingml/2006/main" l="0" t="0" r="0" b="0"/>
@@ -18411,7 +18300,7 @@
     <p:bg>
       <p:bgPr>
         <a:blipFill xmlns:a="http://schemas.openxmlformats.org/drawingml/2006/main">
-          <a:blip xmlns:r="http://schemas.openxmlformats.org/officeDocument/2006/relationships" r:embed="R8426c6b587c44ade">
+          <a:blip xmlns:r="http://schemas.openxmlformats.org/officeDocument/2006/relationships" r:embed="R4e23119ac56b4d2c">
             <a:alphaModFix/>
           </a:blip>
           <a:stretch>
@@ -19044,7 +18933,7 @@
           <p:nvPr/>
         </p:nvPicPr>
         <p:blipFill rotWithShape="1">
-          <a:blip xmlns:r="http://schemas.openxmlformats.org/officeDocument/2006/relationships" xmlns:a="http://schemas.openxmlformats.org/drawingml/2006/main" r:embed="Ra3830bdb54e443f2">
+          <a:blip xmlns:r="http://schemas.openxmlformats.org/officeDocument/2006/relationships" xmlns:a="http://schemas.openxmlformats.org/drawingml/2006/main" r:embed="R655399793cfe4a02">
             <a:alphaModFix/>
           </a:blip>
           <a:srcRect xmlns:a="http://schemas.openxmlformats.org/drawingml/2006/main" l="0" t="0" r="0" b="0"/>
@@ -21700,7 +21589,7 @@
           <p:nvPr/>
         </p:nvPicPr>
         <p:blipFill rotWithShape="1">
-          <a:blip xmlns:r="http://schemas.openxmlformats.org/officeDocument/2006/relationships" xmlns:a="http://schemas.openxmlformats.org/drawingml/2006/main" r:embed="R494a668de80f47a0">
+          <a:blip xmlns:r="http://schemas.openxmlformats.org/officeDocument/2006/relationships" xmlns:a="http://schemas.openxmlformats.org/drawingml/2006/main" r:embed="R0b3487bb52f64b31">
             <a:alphaModFix/>
           </a:blip>
           <a:srcRect xmlns:a="http://schemas.openxmlformats.org/drawingml/2006/main" l="0" t="0" r="0" b="0"/>
@@ -21730,7 +21619,7 @@
     <p:bg>
       <p:bgPr>
         <a:blipFill xmlns:a="http://schemas.openxmlformats.org/drawingml/2006/main">
-          <a:blip xmlns:r="http://schemas.openxmlformats.org/officeDocument/2006/relationships" r:embed="Ra3bef01e125b4b80">
+          <a:blip xmlns:r="http://schemas.openxmlformats.org/officeDocument/2006/relationships" r:embed="Rcb79d993f9e24bc8">
             <a:alphaModFix/>
           </a:blip>
           <a:stretch>
@@ -22574,7 +22463,7 @@
           <p:nvPr/>
         </p:nvPicPr>
         <p:blipFill rotWithShape="1">
-          <a:blip xmlns:r="http://schemas.openxmlformats.org/officeDocument/2006/relationships" xmlns:a="http://schemas.openxmlformats.org/drawingml/2006/main" r:embed="R4750df102cba481e">
+          <a:blip xmlns:r="http://schemas.openxmlformats.org/officeDocument/2006/relationships" xmlns:a="http://schemas.openxmlformats.org/drawingml/2006/main" r:embed="Rb0a27fc98b044368">
             <a:alphaModFix/>
           </a:blip>
           <a:srcRect xmlns:a="http://schemas.openxmlformats.org/drawingml/2006/main" l="0" t="0" r="0" b="0"/>
@@ -22604,7 +22493,7 @@
     <p:bg>
       <p:bgPr>
         <a:blipFill xmlns:a="http://schemas.openxmlformats.org/drawingml/2006/main">
-          <a:blip xmlns:r="http://schemas.openxmlformats.org/officeDocument/2006/relationships" r:embed="R30579fdeffb64c45">
+          <a:blip xmlns:r="http://schemas.openxmlformats.org/officeDocument/2006/relationships" r:embed="R48dc806bd0514e65">
             <a:alphaModFix/>
           </a:blip>
           <a:stretch>
@@ -23552,7 +23441,7 @@
           <p:nvPr/>
         </p:nvPicPr>
         <p:blipFill rotWithShape="1">
-          <a:blip xmlns:r="http://schemas.openxmlformats.org/officeDocument/2006/relationships" xmlns:a="http://schemas.openxmlformats.org/drawingml/2006/main" r:embed="R129e2f1bd61f488b">
+          <a:blip xmlns:r="http://schemas.openxmlformats.org/officeDocument/2006/relationships" xmlns:a="http://schemas.openxmlformats.org/drawingml/2006/main" r:embed="Rff0ae30f75eb43ad">
             <a:alphaModFix/>
           </a:blip>
           <a:srcRect xmlns:a="http://schemas.openxmlformats.org/drawingml/2006/main" l="0" t="0" r="0" b="0"/>
@@ -23582,7 +23471,7 @@
     <p:bg>
       <p:bgPr>
         <a:blipFill xmlns:a="http://schemas.openxmlformats.org/drawingml/2006/main">
-          <a:blip xmlns:r="http://schemas.openxmlformats.org/officeDocument/2006/relationships" r:embed="R362f4b35bd1c418b">
+          <a:blip xmlns:r="http://schemas.openxmlformats.org/officeDocument/2006/relationships" r:embed="R32afa448c4374c88">
             <a:alphaModFix/>
           </a:blip>
           <a:stretch>
@@ -24043,7 +23932,7 @@
           <p:nvPr/>
         </p:nvPicPr>
         <p:blipFill rotWithShape="1">
-          <a:blip xmlns:r="http://schemas.openxmlformats.org/officeDocument/2006/relationships" xmlns:a="http://schemas.openxmlformats.org/drawingml/2006/main" r:embed="Rf7e65540f0ee4926">
+          <a:blip xmlns:r="http://schemas.openxmlformats.org/officeDocument/2006/relationships" xmlns:a="http://schemas.openxmlformats.org/drawingml/2006/main" r:embed="R3902d30833a24cba">
             <a:alphaModFix/>
           </a:blip>
           <a:srcRect xmlns:a="http://schemas.openxmlformats.org/drawingml/2006/main" l="0" t="0" r="0" b="0"/>
@@ -25755,22 +25644,22 @@
   </p:cSld>
   <p:clrMap bg1="lt1" tx1="dk1" bg2="dk2" tx2="lt2" accent1="accent1" accent2="accent2" accent3="accent3" accent4="accent4" accent5="accent5" accent6="accent6" hlink="hlink" folHlink="folHlink"/>
   <p:sldLayoutIdLst>
-    <p:sldLayoutId xmlns:r="http://schemas.openxmlformats.org/officeDocument/2006/relationships" id="2147483649" r:id="R4cdff3664bef4888"/>
-    <p:sldLayoutId xmlns:r="http://schemas.openxmlformats.org/officeDocument/2006/relationships" id="2147483650" r:id="Rf858bb8b773e4138"/>
-    <p:sldLayoutId xmlns:r="http://schemas.openxmlformats.org/officeDocument/2006/relationships" id="2147483651" r:id="R084b241c48c448c9"/>
-    <p:sldLayoutId xmlns:r="http://schemas.openxmlformats.org/officeDocument/2006/relationships" id="2147483652" r:id="R7c8c6fef92b840e8"/>
-    <p:sldLayoutId xmlns:r="http://schemas.openxmlformats.org/officeDocument/2006/relationships" id="2147483653" r:id="R4bf27038aa5744ec"/>
-    <p:sldLayoutId xmlns:r="http://schemas.openxmlformats.org/officeDocument/2006/relationships" id="2147483654" r:id="Rea5437206eec4853"/>
-    <p:sldLayoutId xmlns:r="http://schemas.openxmlformats.org/officeDocument/2006/relationships" id="2147483655" r:id="Reec4ce420e004863"/>
-    <p:sldLayoutId xmlns:r="http://schemas.openxmlformats.org/officeDocument/2006/relationships" id="2147483656" r:id="R50db0a2b5fe84c2b"/>
-    <p:sldLayoutId xmlns:r="http://schemas.openxmlformats.org/officeDocument/2006/relationships" id="2147483657" r:id="Re17bcace707b4426"/>
-    <p:sldLayoutId xmlns:r="http://schemas.openxmlformats.org/officeDocument/2006/relationships" id="2147483658" r:id="R2d1e2b3de7054353"/>
-    <p:sldLayoutId xmlns:r="http://schemas.openxmlformats.org/officeDocument/2006/relationships" id="2147483659" r:id="R3fbd5711db33423d"/>
-    <p:sldLayoutId xmlns:r="http://schemas.openxmlformats.org/officeDocument/2006/relationships" id="2147483660" r:id="R7ecc616fc4384f68"/>
-    <p:sldLayoutId xmlns:r="http://schemas.openxmlformats.org/officeDocument/2006/relationships" id="2147483661" r:id="R4f032b0d7674455d"/>
-    <p:sldLayoutId xmlns:r="http://schemas.openxmlformats.org/officeDocument/2006/relationships" id="2147483662" r:id="R21ca6525aef2458b"/>
-    <p:sldLayoutId xmlns:r="http://schemas.openxmlformats.org/officeDocument/2006/relationships" id="2147483663" r:id="R77879285579f4c30"/>
-    <p:sldLayoutId xmlns:r="http://schemas.openxmlformats.org/officeDocument/2006/relationships" id="2147483664" r:id="Rf7b2920fb4044042"/>
+    <p:sldLayoutId xmlns:r="http://schemas.openxmlformats.org/officeDocument/2006/relationships" id="2147483649" r:id="R94507f8ee73d44af"/>
+    <p:sldLayoutId xmlns:r="http://schemas.openxmlformats.org/officeDocument/2006/relationships" id="2147483650" r:id="Rc51c48a8765a4c2f"/>
+    <p:sldLayoutId xmlns:r="http://schemas.openxmlformats.org/officeDocument/2006/relationships" id="2147483651" r:id="R48096b092a174dba"/>
+    <p:sldLayoutId xmlns:r="http://schemas.openxmlformats.org/officeDocument/2006/relationships" id="2147483652" r:id="R8f51d2054bb04e06"/>
+    <p:sldLayoutId xmlns:r="http://schemas.openxmlformats.org/officeDocument/2006/relationships" id="2147483653" r:id="R40f56d31089f4386"/>
+    <p:sldLayoutId xmlns:r="http://schemas.openxmlformats.org/officeDocument/2006/relationships" id="2147483654" r:id="R1d7b2e42fe1147af"/>
+    <p:sldLayoutId xmlns:r="http://schemas.openxmlformats.org/officeDocument/2006/relationships" id="2147483655" r:id="Rab7704a50261401c"/>
+    <p:sldLayoutId xmlns:r="http://schemas.openxmlformats.org/officeDocument/2006/relationships" id="2147483656" r:id="R6fbb2d74e4c3466c"/>
+    <p:sldLayoutId xmlns:r="http://schemas.openxmlformats.org/officeDocument/2006/relationships" id="2147483657" r:id="Re373aba6ebd944c1"/>
+    <p:sldLayoutId xmlns:r="http://schemas.openxmlformats.org/officeDocument/2006/relationships" id="2147483658" r:id="R0b6b6f726669456e"/>
+    <p:sldLayoutId xmlns:r="http://schemas.openxmlformats.org/officeDocument/2006/relationships" id="2147483659" r:id="R2f82e78f10614bc2"/>
+    <p:sldLayoutId xmlns:r="http://schemas.openxmlformats.org/officeDocument/2006/relationships" id="2147483660" r:id="Re6d0719ae8ee4e95"/>
+    <p:sldLayoutId xmlns:r="http://schemas.openxmlformats.org/officeDocument/2006/relationships" id="2147483661" r:id="R4b9e7e6548ce42c3"/>
+    <p:sldLayoutId xmlns:r="http://schemas.openxmlformats.org/officeDocument/2006/relationships" id="2147483662" r:id="R38e874b245d34c67"/>
+    <p:sldLayoutId xmlns:r="http://schemas.openxmlformats.org/officeDocument/2006/relationships" id="2147483663" r:id="Rbc39e0ae0e1b49b1"/>
+    <p:sldLayoutId xmlns:r="http://schemas.openxmlformats.org/officeDocument/2006/relationships" id="2147483664" r:id="R779cbce639454cbb"/>
   </p:sldLayoutIdLst>
   <p:hf hdr="0" ftr="0" dt="0"/>
   <p:txStyles>
@@ -27963,7 +27852,7 @@
           <p:nvPr/>
         </p:nvPicPr>
         <p:blipFill rotWithShape="1">
-          <a:blip xmlns:r="http://schemas.openxmlformats.org/officeDocument/2006/relationships" xmlns:a="http://schemas.openxmlformats.org/drawingml/2006/main" r:embed="R97a206a1ea4b4457">
+          <a:blip xmlns:r="http://schemas.openxmlformats.org/officeDocument/2006/relationships" xmlns:a="http://schemas.openxmlformats.org/drawingml/2006/main" r:embed="Rf68a075a200e42df">
             <a:alphaModFix/>
           </a:blip>
           <a:srcRect xmlns:a="http://schemas.openxmlformats.org/drawingml/2006/main" l="0" t="0" r="0" b="0"/>
@@ -27986,19 +27875,19 @@
   </p:cSld>
   <p:clrMap bg1="lt1" tx1="dk1" bg2="dk2" tx2="lt2" accent1="accent1" accent2="accent2" accent3="accent3" accent4="accent4" accent5="accent5" accent6="accent6" hlink="hlink" folHlink="folHlink"/>
   <p:sldLayoutIdLst>
-    <p:sldLayoutId xmlns:r="http://schemas.openxmlformats.org/officeDocument/2006/relationships" id="2147483666" r:id="R1b602015136f4239"/>
-    <p:sldLayoutId xmlns:r="http://schemas.openxmlformats.org/officeDocument/2006/relationships" id="2147483667" r:id="R5ce607f5369d4e4d"/>
-    <p:sldLayoutId xmlns:r="http://schemas.openxmlformats.org/officeDocument/2006/relationships" id="2147483668" r:id="Rc4f4449347bc48aa"/>
-    <p:sldLayoutId xmlns:r="http://schemas.openxmlformats.org/officeDocument/2006/relationships" id="2147483669" r:id="R10c90ebb992f4e1a"/>
-    <p:sldLayoutId xmlns:r="http://schemas.openxmlformats.org/officeDocument/2006/relationships" id="2147483670" r:id="R2c2fdca3d6574b1e"/>
-    <p:sldLayoutId xmlns:r="http://schemas.openxmlformats.org/officeDocument/2006/relationships" id="2147483671" r:id="Radd7d2b5418b4452"/>
-    <p:sldLayoutId xmlns:r="http://schemas.openxmlformats.org/officeDocument/2006/relationships" id="2147483672" r:id="Ra82f10f10a25410a"/>
-    <p:sldLayoutId xmlns:r="http://schemas.openxmlformats.org/officeDocument/2006/relationships" id="2147483673" r:id="Rd22e533181254af8"/>
-    <p:sldLayoutId xmlns:r="http://schemas.openxmlformats.org/officeDocument/2006/relationships" id="2147483674" r:id="R4951c2a459a64a43"/>
-    <p:sldLayoutId xmlns:r="http://schemas.openxmlformats.org/officeDocument/2006/relationships" id="2147483675" r:id="R281f95b5d21149fb"/>
-    <p:sldLayoutId xmlns:r="http://schemas.openxmlformats.org/officeDocument/2006/relationships" id="2147483676" r:id="Rbf3f05751b3f4fac"/>
-    <p:sldLayoutId xmlns:r="http://schemas.openxmlformats.org/officeDocument/2006/relationships" id="2147483677" r:id="R6e73a3e5fe3b42f0"/>
-    <p:sldLayoutId xmlns:r="http://schemas.openxmlformats.org/officeDocument/2006/relationships" id="2147483678" r:id="R784db618bc584d85"/>
+    <p:sldLayoutId xmlns:r="http://schemas.openxmlformats.org/officeDocument/2006/relationships" id="2147483666" r:id="Rc1ed23cdc8d14dad"/>
+    <p:sldLayoutId xmlns:r="http://schemas.openxmlformats.org/officeDocument/2006/relationships" id="2147483667" r:id="Rffb82c0640084ec2"/>
+    <p:sldLayoutId xmlns:r="http://schemas.openxmlformats.org/officeDocument/2006/relationships" id="2147483668" r:id="Rf602d74d8c1b4f7e"/>
+    <p:sldLayoutId xmlns:r="http://schemas.openxmlformats.org/officeDocument/2006/relationships" id="2147483669" r:id="Re7f66cc8b2c2413b"/>
+    <p:sldLayoutId xmlns:r="http://schemas.openxmlformats.org/officeDocument/2006/relationships" id="2147483670" r:id="R5acd52313d374c93"/>
+    <p:sldLayoutId xmlns:r="http://schemas.openxmlformats.org/officeDocument/2006/relationships" id="2147483671" r:id="R0afa2f8ada6e47f4"/>
+    <p:sldLayoutId xmlns:r="http://schemas.openxmlformats.org/officeDocument/2006/relationships" id="2147483672" r:id="R84044ed7f22d487c"/>
+    <p:sldLayoutId xmlns:r="http://schemas.openxmlformats.org/officeDocument/2006/relationships" id="2147483673" r:id="R0c2ee317979645e2"/>
+    <p:sldLayoutId xmlns:r="http://schemas.openxmlformats.org/officeDocument/2006/relationships" id="2147483674" r:id="Rdb4a22f1179f40cb"/>
+    <p:sldLayoutId xmlns:r="http://schemas.openxmlformats.org/officeDocument/2006/relationships" id="2147483675" r:id="R79cae61ba8a84484"/>
+    <p:sldLayoutId xmlns:r="http://schemas.openxmlformats.org/officeDocument/2006/relationships" id="2147483676" r:id="Rd35f3cefae9841b1"/>
+    <p:sldLayoutId xmlns:r="http://schemas.openxmlformats.org/officeDocument/2006/relationships" id="2147483677" r:id="R81107fe299e147e7"/>
+    <p:sldLayoutId xmlns:r="http://schemas.openxmlformats.org/officeDocument/2006/relationships" id="2147483678" r:id="Rbff2c8227e3f48c8"/>
   </p:sldLayoutIdLst>
   <p:hf hdr="0" ftr="0" dt="0"/>
   <p:txStyles>
@@ -29395,7 +29284,7 @@
           <a:lstStyle xmlns:a="http://schemas.openxmlformats.org/drawingml/2006/main"/>
           <a:p xmlns:a="http://schemas.openxmlformats.org/drawingml/2006/main">
             <a:r>
-              <a:t>Why this is useful across UXL projects</a:t>
+              <a:t>What the skill tells an agent today</a:t>
             </a:r>
           </a:p>
         </p:txBody>
@@ -29445,7 +29334,7 @@
                   <a:srgbClr val="000000"/>
                 </a:solidFill>
               </a:rPr>
-              <a:t> Stop premature speedup claims — Correctness and a valid baseline must pass before performance is discussed.</a:t>
+              <a:t> Write the user-visible correctness contract first — Outputs, metrics, tolerances, and failure criteria.</a:t>
             </a:r>
           </a:p>
           <a:p xmlns:a="http://schemas.openxmlformats.org/drawingml/2006/main">
@@ -29466,7 +29355,7 @@
                   <a:srgbClr val="000000"/>
                 </a:solidFill>
               </a:rPr>
-              <a:t> Make timing comparable — Setup, transfer, warmup, steady state, synchronization, topology, and resource limits are declared.</a:t>
+              <a:t> Choose the baseline and scope — State exactly which work each timing includes.</a:t>
             </a:r>
           </a:p>
           <a:p xmlns:a="http://schemas.openxmlformats.org/drawingml/2006/main">
@@ -29487,7 +29376,7 @@
                   <a:srgbClr val="000000"/>
                 </a:solidFill>
               </a:rPr>
-              <a:t> Handle numerical reality — Tolerances and non-associative reductions are part of the test contract.</a:t>
+              <a:t> Warm up and repeat — Report distribution and variance, not a single best run.</a:t>
             </a:r>
           </a:p>
           <a:p xmlns:a="http://schemas.openxmlformats.org/drawingml/2006/main">
@@ -29508,7 +29397,28 @@
                   <a:srgbClr val="000000"/>
                 </a:solidFill>
               </a:rPr>
-              <a:t> Keep claims bounded — Results describe the measured software, model, harness, toolchain, and hardware cell—not a universal score.</a:t>
+              <a:t> Synchronize asynchronous work — Host timers stop only after the measured operation completes.</a:t>
+            </a:r>
+          </a:p>
+          <a:p xmlns:a="http://schemas.openxmlformats.org/drawingml/2006/main">
+            <a:pPr marL="30" indent="-18">
+              <a:spcAft>
+                <a:spcPts val="10"/>
+              </a:spcAft>
+              <a:buChar char="•"/>
+              <a:defRPr sz="1913">
+                <a:solidFill>
+                  <a:srgbClr val="000000"/>
+                </a:solidFill>
+              </a:defRPr>
+            </a:pPr>
+            <a:r>
+              <a:rPr sz="1913" b="1">
+                <a:solidFill>
+                  <a:srgbClr val="000000"/>
+                </a:solidFill>
+              </a:rPr>
+              <a:t> Profile after a validated regression — Profilers explain a measured problem; they do not create one.</a:t>
             </a:r>
           </a:p>
         </p:txBody>
@@ -29600,7 +29510,7 @@
           <a:lstStyle xmlns:a="http://schemas.openxmlformats.org/drawingml/2006/main"/>
           <a:p xmlns:a="http://schemas.openxmlformats.org/drawingml/2006/main">
             <a:r>
-              <a:t>What the skill tells an agent today</a:t>
+              <a:t>Evaluation inventory: 4 implemented, 2 target gaps</a:t>
             </a:r>
           </a:p>
         </p:txBody>
@@ -29650,7 +29560,7 @@
                   <a:srgbClr val="000000"/>
                 </a:solidFill>
               </a:rPr>
-              <a:t> Write the user-visible correctness contract first — Outputs, metrics, tolerances, and failure criteria.</a:t>
+              <a:t> Implemented — Tiny async GPU claim; benchmark report repair; floating-reduction tolerance; cgroup concurrency quota.</a:t>
             </a:r>
           </a:p>
           <a:p xmlns:a="http://schemas.openxmlformats.org/drawingml/2006/main">
@@ -29671,7 +29581,7 @@
                   <a:srgbClr val="000000"/>
                 </a:solidFill>
               </a:rPr>
-              <a:t> Choose the baseline and scope — State exactly which work each timing includes.</a:t>
+              <a:t> Incident evidence — The concurrency task is grounded in a oneTBB maintainer incident.</a:t>
             </a:r>
           </a:p>
           <a:p xmlns:a="http://schemas.openxmlformats.org/drawingml/2006/main">
@@ -29692,7 +29602,7 @@
                   <a:srgbClr val="000000"/>
                 </a:solidFill>
               </a:rPr>
-              <a:t> Warm up and repeat — Report distribution and variance, not a single best run.</a:t>
+              <a:t> Planned — Transfer-inclusive comparison and profile-after-regression on declared target lanes.</a:t>
             </a:r>
           </a:p>
           <a:p xmlns:a="http://schemas.openxmlformats.org/drawingml/2006/main">
@@ -29713,28 +29623,7 @@
                   <a:srgbClr val="000000"/>
                 </a:solidFill>
               </a:rPr>
-              <a:t> Synchronize asynchronous work — Host timers stop only after the measured operation completes.</a:t>
-            </a:r>
-          </a:p>
-          <a:p xmlns:a="http://schemas.openxmlformats.org/drawingml/2006/main">
-            <a:pPr marL="30" indent="-18">
-              <a:spcAft>
-                <a:spcPts val="10"/>
-              </a:spcAft>
-              <a:buChar char="•"/>
-              <a:defRPr sz="1913">
-                <a:solidFill>
-                  <a:srgbClr val="000000"/>
-                </a:solidFill>
-              </a:defRPr>
-            </a:pPr>
-            <a:r>
-              <a:rPr sz="1913" b="1">
-                <a:solidFill>
-                  <a:srgbClr val="000000"/>
-                </a:solidFill>
-              </a:rPr>
-              <a:t> Profile after a validated regression — Profilers explain a measured problem; they do not create one.</a:t>
+              <a:t> What this proves — Current tasks test evidence discipline; none yet retains measured skill headroom for promotion.</a:t>
             </a:r>
           </a:p>
         </p:txBody>
@@ -29826,7 +29715,7 @@
           <a:lstStyle xmlns:a="http://schemas.openxmlformats.org/drawingml/2006/main"/>
           <a:p xmlns:a="http://schemas.openxmlformats.org/drawingml/2006/main">
             <a:r>
-              <a:t>Evaluation inventory: 4 implemented, 2 target gaps</a:t>
+              <a:t>How we chose the content</a:t>
             </a:r>
           </a:p>
         </p:txBody>
@@ -29876,7 +29765,7 @@
                   <a:srgbClr val="000000"/>
                 </a:solidFill>
               </a:rPr>
-              <a:t> Implemented — Tiny async GPU claim; benchmark report repair; floating-reduction tolerance; cgroup concurrency quota.</a:t>
+              <a:t> Project-native benchmarks first — Each library's tests and benchmark tools remain authoritative.</a:t>
             </a:r>
           </a:p>
           <a:p xmlns:a="http://schemas.openxmlformats.org/drawingml/2006/main">
@@ -29897,7 +29786,7 @@
                   <a:srgbClr val="000000"/>
                 </a:solidFill>
               </a:rPr>
-              <a:t> Incident evidence — The concurrency task is grounded in a oneTBB maintainer incident.</a:t>
+              <a:t> Cross-project invariants — Correctness, baseline, scope, synchronization, variance, provenance, and claim language recur everywhere.</a:t>
             </a:r>
           </a:p>
           <a:p xmlns:a="http://schemas.openxmlformats.org/drawingml/2006/main">
@@ -29918,7 +29807,7 @@
                   <a:srgbClr val="000000"/>
                 </a:solidFill>
               </a:rPr>
-              <a:t> Planned — Transfer-inclusive comparison and profile-after-regression on declared target lanes.</a:t>
+              <a:t> Adversarial scenarios — Tasks target tempting but invalid conclusions, not just command recall.</a:t>
             </a:r>
           </a:p>
           <a:p xmlns:a="http://schemas.openxmlformats.org/drawingml/2006/main">
@@ -29939,7 +29828,7 @@
                   <a:srgbClr val="000000"/>
                 </a:solidFill>
               </a:rPr>
-              <a:t> What this proves — Current tasks test evidence discipline; none yet retains measured skill headroom for promotion.</a:t>
+              <a:t> Visible gaps — Target-dependent measurement remains planned until qualified lanes and authentic regressions exist.</a:t>
             </a:r>
           </a:p>
         </p:txBody>
@@ -30031,7 +29920,7 @@
           <a:lstStyle xmlns:a="http://schemas.openxmlformats.org/drawingml/2006/main"/>
           <a:p xmlns:a="http://schemas.openxmlformats.org/drawingml/2006/main">
             <a:r>
-              <a:t>How we chose the content</a:t>
+              <a:t>What shared ownership would look like</a:t>
             </a:r>
           </a:p>
         </p:txBody>
@@ -30081,7 +29970,7 @@
                   <a:srgbClr val="000000"/>
                 </a:solidFill>
               </a:rPr>
-              <a:t> Project-native benchmarks first — Each library's tests and benchmark tools remain authoritative.</a:t>
+              <a:t> Working-group reviewers own — The common evidence and claim contract.</a:t>
             </a:r>
           </a:p>
           <a:p xmlns:a="http://schemas.openxmlformats.org/drawingml/2006/main">
@@ -30102,7 +29991,7 @@
                   <a:srgbClr val="000000"/>
                 </a:solidFill>
               </a:rPr>
-              <a:t> Cross-project invariants — Correctness, baseline, scope, synchronization, variance, provenance, and claim language recur everywhere.</a:t>
+              <a:t> Project benchmark owners supply — Approved commands, metrics, tolerances, representative sizes, and interpretation limits.</a:t>
             </a:r>
           </a:p>
           <a:p xmlns:a="http://schemas.openxmlformats.org/drawingml/2006/main">
@@ -30123,7 +30012,7 @@
                   <a:srgbClr val="000000"/>
                 </a:solidFill>
               </a:rPr>
-              <a:t> Adversarial scenarios — Tasks target tempting but invalid conclusions, not just command recall.</a:t>
+              <a:t> Hardware owners qualify lanes — They prove the environment, not the skill's value.</a:t>
             </a:r>
           </a:p>
           <a:p xmlns:a="http://schemas.openxmlformats.org/drawingml/2006/main">
@@ -30144,7 +30033,7 @@
                   <a:srgbClr val="000000"/>
                 </a:solidFill>
               </a:rPr>
-              <a:t> Visible gaps — Target-dependent measurement remains planned until qualified lanes and authentic regressions exist.</a:t>
+              <a:t> UXL infrastructure maintains — Matched evaluation cells, provenance schemas, Harbor artifacts, and public dashboards.</a:t>
             </a:r>
           </a:p>
         </p:txBody>
@@ -30236,211 +30125,6 @@
           <a:lstStyle xmlns:a="http://schemas.openxmlformats.org/drawingml/2006/main"/>
           <a:p xmlns:a="http://schemas.openxmlformats.org/drawingml/2006/main">
             <a:r>
-              <a:t>What shared ownership would look like</a:t>
-            </a:r>
-          </a:p>
-        </p:txBody>
-      </p:sp>
-      <p:sp>
-        <p:nvSpPr>
-          <p:cNvPr id="3" name="Content Placeholder 2">
-            <a:extLst xmlns:a="http://schemas.openxmlformats.org/drawingml/2006/main">
-              <a:ext uri="{FF2B5EF4-FFF2-40B4-BE49-F238E27FC236}">
-                <a16:creationId xmlns:a16="http://schemas.microsoft.com/office/drawing/2014/main" id="{ECF5C9F1-2691-0BC9-F1E1-01CECB857FE3}"/>
-              </a:ext>
-            </a:extLst>
-          </p:cNvPr>
-          <p:cNvSpPr>
-            <a:spLocks xmlns:a="http://schemas.openxmlformats.org/drawingml/2006/main" noGrp="1"/>
-          </p:cNvSpPr>
-          <p:nvPr>
-            <p:ph type="body" idx="1"/>
-          </p:nvPr>
-        </p:nvSpPr>
-        <p:spPr>
-          <a:xfrm xmlns:a="http://schemas.openxmlformats.org/drawingml/2006/main">
-            <a:off x="838200" y="1825625"/>
-            <a:ext cx="10515600" cy="4351200"/>
-          </a:xfrm>
-        </p:spPr>
-        <p:txBody>
-          <a:bodyPr xmlns:a="http://schemas.openxmlformats.org/drawingml/2006/main" wrap="square" anchor="t">
-            <a:normAutofit fontScale="100000"/>
-          </a:bodyPr>
-          <a:lstStyle xmlns:a="http://schemas.openxmlformats.org/drawingml/2006/main"/>
-          <a:p xmlns:a="http://schemas.openxmlformats.org/drawingml/2006/main">
-            <a:pPr marL="30" indent="-18">
-              <a:spcAft>
-                <a:spcPts val="10"/>
-              </a:spcAft>
-              <a:buChar char="•"/>
-              <a:defRPr sz="1913">
-                <a:solidFill>
-                  <a:srgbClr val="000000"/>
-                </a:solidFill>
-              </a:defRPr>
-            </a:pPr>
-            <a:r>
-              <a:rPr sz="1913" b="1">
-                <a:solidFill>
-                  <a:srgbClr val="000000"/>
-                </a:solidFill>
-              </a:rPr>
-              <a:t> Working-group reviewers own — The common evidence and claim contract.</a:t>
-            </a:r>
-          </a:p>
-          <a:p xmlns:a="http://schemas.openxmlformats.org/drawingml/2006/main">
-            <a:pPr marL="30" indent="-18">
-              <a:spcAft>
-                <a:spcPts val="10"/>
-              </a:spcAft>
-              <a:buChar char="•"/>
-              <a:defRPr sz="1913">
-                <a:solidFill>
-                  <a:srgbClr val="000000"/>
-                </a:solidFill>
-              </a:defRPr>
-            </a:pPr>
-            <a:r>
-              <a:rPr sz="1913" b="1">
-                <a:solidFill>
-                  <a:srgbClr val="000000"/>
-                </a:solidFill>
-              </a:rPr>
-              <a:t> Project benchmark owners supply — Approved commands, metrics, tolerances, representative sizes, and interpretation limits.</a:t>
-            </a:r>
-          </a:p>
-          <a:p xmlns:a="http://schemas.openxmlformats.org/drawingml/2006/main">
-            <a:pPr marL="30" indent="-18">
-              <a:spcAft>
-                <a:spcPts val="10"/>
-              </a:spcAft>
-              <a:buChar char="•"/>
-              <a:defRPr sz="1913">
-                <a:solidFill>
-                  <a:srgbClr val="000000"/>
-                </a:solidFill>
-              </a:defRPr>
-            </a:pPr>
-            <a:r>
-              <a:rPr sz="1913" b="1">
-                <a:solidFill>
-                  <a:srgbClr val="000000"/>
-                </a:solidFill>
-              </a:rPr>
-              <a:t> Hardware owners qualify lanes — They prove the environment, not the skill's value.</a:t>
-            </a:r>
-          </a:p>
-          <a:p xmlns:a="http://schemas.openxmlformats.org/drawingml/2006/main">
-            <a:pPr marL="30" indent="-18">
-              <a:spcAft>
-                <a:spcPts val="10"/>
-              </a:spcAft>
-              <a:buChar char="•"/>
-              <a:defRPr sz="1913">
-                <a:solidFill>
-                  <a:srgbClr val="000000"/>
-                </a:solidFill>
-              </a:defRPr>
-            </a:pPr>
-            <a:r>
-              <a:rPr sz="1913" b="1">
-                <a:solidFill>
-                  <a:srgbClr val="000000"/>
-                </a:solidFill>
-              </a:rPr>
-              <a:t> UXL infrastructure maintains — Matched evaluation cells, provenance schemas, Harbor artifacts, and public dashboards.</a:t>
-            </a:r>
-          </a:p>
-        </p:txBody>
-      </p:sp>
-      <p:sp>
-        <p:nvSpPr>
-          <p:cNvPr id="7" name="TextBox 6">
-            <a:extLst xmlns:a="http://schemas.openxmlformats.org/drawingml/2006/main">
-              <a:ext uri="{FF2B5EF4-FFF2-40B4-BE49-F238E27FC236}">
-                <a16:creationId xmlns:a16="http://schemas.microsoft.com/office/drawing/2014/main" id="{E2E6F043-0F84-54F7-A567-6E5851801779}"/>
-              </a:ext>
-            </a:extLst>
-          </p:cNvPr>
-          <p:cNvSpPr>
-            <a:spLocks xmlns:a="http://schemas.openxmlformats.org/drawingml/2006/main" noGrp="1"/>
-          </p:cNvSpPr>
-          <p:nvPr/>
-        </p:nvSpPr>
-        <p:spPr>
-          <a:xfrm xmlns:a="http://schemas.openxmlformats.org/drawingml/2006/main">
-            <a:off x="696174" y="6338986"/>
-            <a:ext cx="284052" cy="307777"/>
-          </a:xfrm>
-          <a:prstGeom xmlns:a="http://schemas.openxmlformats.org/drawingml/2006/main" prst="rect">
-            <a:avLst/>
-          </a:prstGeom>
-          <a:noFill xmlns:a="http://schemas.openxmlformats.org/drawingml/2006/main"/>
-        </p:spPr>
-        <p:txBody>
-          <a:bodyPr xmlns:a="http://schemas.openxmlformats.org/drawingml/2006/main" wrap="none">
-            <a:spAutoFit/>
-          </a:bodyPr>
-          <a:lstStyle xmlns:a="http://schemas.openxmlformats.org/drawingml/2006/main"/>
-          <a:p xmlns:a="http://schemas.openxmlformats.org/drawingml/2006/main">
-            <a:r>
-              <a:t>6</a:t>
-            </a:r>
-          </a:p>
-        </p:txBody>
-      </p:sp>
-    </p:spTree>
-    <p:extLst>
-      <p:ext uri="{BB962C8B-B14F-4D97-AF65-F5344CB8AC3E}">
-        <p14:creationId xmlns:p14="http://schemas.microsoft.com/office/powerpoint/2010/main" val="1742728663"/>
-      </p:ext>
-    </p:extLst>
-  </p:cSld>
-</p:sld>
-</file>
-
-<file path=ppt/slides/slide7.xml><?xml version="1.0" encoding="utf-8"?>
-<p:sld xmlns:p="http://schemas.openxmlformats.org/presentationml/2006/main">
-  <p:cSld>
-    <p:spTree>
-      <p:nvGrpSpPr>
-        <p:cNvPr id="1" name=""/>
-        <p:cNvGrpSpPr/>
-        <p:nvPr/>
-      </p:nvGrpSpPr>
-      <p:grpSpPr>
-        <a:xfrm xmlns:a="http://schemas.openxmlformats.org/drawingml/2006/main"/>
-      </p:grpSpPr>
-      <p:sp>
-        <p:nvSpPr>
-          <p:cNvPr id="2" name="Title 1">
-            <a:extLst xmlns:a="http://schemas.openxmlformats.org/drawingml/2006/main">
-              <a:ext uri="{FF2B5EF4-FFF2-40B4-BE49-F238E27FC236}">
-                <a16:creationId xmlns:a16="http://schemas.microsoft.com/office/drawing/2014/main" id="{F64C2A24-546D-C55C-2C52-97A4957F67E0}"/>
-              </a:ext>
-            </a:extLst>
-          </p:cNvPr>
-          <p:cNvSpPr>
-            <a:spLocks xmlns:a="http://schemas.openxmlformats.org/drawingml/2006/main" noGrp="1"/>
-          </p:cNvSpPr>
-          <p:nvPr>
-            <p:ph type="title" idx="0"/>
-          </p:nvPr>
-        </p:nvSpPr>
-        <p:spPr>
-          <a:xfrm xmlns:a="http://schemas.openxmlformats.org/drawingml/2006/main">
-            <a:off x="838200" y="365125"/>
-            <a:ext cx="10515600" cy="1325700"/>
-          </a:xfrm>
-        </p:spPr>
-        <p:txBody>
-          <a:bodyPr xmlns:a="http://schemas.openxmlformats.org/drawingml/2006/main">
-            <a:normAutofit fontScale="100000"/>
-          </a:bodyPr>
-          <a:lstStyle xmlns:a="http://schemas.openxmlformats.org/drawingml/2006/main"/>
-          <a:p xmlns:a="http://schemas.openxmlformats.org/drawingml/2006/main">
-            <a:r>
               <a:t>A focused 30-minute maintainer review</a:t>
             </a:r>
           </a:p>
@@ -30611,7 +30295,7 @@
           <a:lstStyle xmlns:a="http://schemas.openxmlformats.org/drawingml/2006/main"/>
           <a:p xmlns:a="http://schemas.openxmlformats.org/drawingml/2006/main">
             <a:r>
-              <a:t>7</a:t>
+              <a:t>6</a:t>
             </a:r>
           </a:p>
         </p:txBody>

--- a/evaluation/dashboard/public/decks/uxl-performance-validation-maintainer-briefing.pptx
+++ b/evaluation/dashboard/public/decks/uxl-performance-validation-maintainer-briefing.pptx
@@ -2,19 +2,19 @@
 <file path=ppt/presentation.xml><?xml version="1.0" encoding="utf-8"?>
 <p:presentation xmlns:p="http://schemas.openxmlformats.org/presentationml/2006/main">
   <p:sldMasterIdLst>
-    <p:sldMasterId xmlns:r="http://schemas.openxmlformats.org/officeDocument/2006/relationships" id="2147483648" r:id="R6cec4d78472c48ce"/>
-    <p:sldMasterId xmlns:r="http://schemas.openxmlformats.org/officeDocument/2006/relationships" id="2147483665" r:id="R6cd37fa2503946d6"/>
+    <p:sldMasterId xmlns:r="http://schemas.openxmlformats.org/officeDocument/2006/relationships" id="2147483648" r:id="Rf4fc00bfe81d436a"/>
+    <p:sldMasterId xmlns:r="http://schemas.openxmlformats.org/officeDocument/2006/relationships" id="2147483665" r:id="R44d03f6aa6bc463c"/>
   </p:sldMasterIdLst>
   <p:notesMasterIdLst>
-    <p:notesMasterId xmlns:r="http://schemas.openxmlformats.org/officeDocument/2006/relationships" r:id="Re95bcf66c5ee4803"/>
+    <p:notesMasterId xmlns:r="http://schemas.openxmlformats.org/officeDocument/2006/relationships" r:id="R419e04e6f3124ccd"/>
   </p:notesMasterIdLst>
   <p:sldIdLst>
-    <p:sldId xmlns:r="http://schemas.openxmlformats.org/officeDocument/2006/relationships" id="256" r:id="Rc4b5ce1472eb443c"/>
-    <p:sldId xmlns:r="http://schemas.openxmlformats.org/officeDocument/2006/relationships" id="257" r:id="R767987d457684969"/>
-    <p:sldId xmlns:r="http://schemas.openxmlformats.org/officeDocument/2006/relationships" id="258" r:id="Rb01dc0b9db674b0f"/>
-    <p:sldId xmlns:r="http://schemas.openxmlformats.org/officeDocument/2006/relationships" id="259" r:id="R91d0f48f25174529"/>
-    <p:sldId xmlns:r="http://schemas.openxmlformats.org/officeDocument/2006/relationships" id="260" r:id="Ref662cb50eaf48f9"/>
-    <p:sldId xmlns:r="http://schemas.openxmlformats.org/officeDocument/2006/relationships" id="261" r:id="R805843fd6879411b"/>
+    <p:sldId xmlns:r="http://schemas.openxmlformats.org/officeDocument/2006/relationships" id="256" r:id="R5aed1e11fcb44c0d"/>
+    <p:sldId xmlns:r="http://schemas.openxmlformats.org/officeDocument/2006/relationships" id="257" r:id="R3147a4b2d8154b18"/>
+    <p:sldId xmlns:r="http://schemas.openxmlformats.org/officeDocument/2006/relationships" id="258" r:id="Rcdfc2750efb24a74"/>
+    <p:sldId xmlns:r="http://schemas.openxmlformats.org/officeDocument/2006/relationships" id="259" r:id="Rc9352622d8914114"/>
+    <p:sldId xmlns:r="http://schemas.openxmlformats.org/officeDocument/2006/relationships" id="260" r:id="R14865100150d456e"/>
+    <p:sldId xmlns:r="http://schemas.openxmlformats.org/officeDocument/2006/relationships" id="261" r:id="Rb0e7fd1503734022"/>
   </p:sldIdLst>
   <p:sldSz cx="12192000" cy="6858000"/>
   <p:notesSz cx="6858000" cy="9144000"/>
@@ -518,7 +518,22 @@
           </a:p>
           <a:p xmlns:a="http://schemas.openxmlformats.org/drawingml/2006/main">
             <a:r>
-              <a:t>Speaker cue: UXL SKILLS EVALUATOR: Performance Validation Skill</a:t>
+              <a:t>Presenter guidance</a:t>
+            </a:r>
+          </a:p>
+          <a:p xmlns:a="http://schemas.openxmlformats.org/drawingml/2006/main">
+            <a:r>
+              <a:t>Purpose: Introduce the shared performance-validation skill and its current 4-of-6 runnable task inventory.</a:t>
+            </a:r>
+          </a:p>
+          <a:p xmlns:a="http://schemas.openxmlformats.org/drawingml/2006/main">
+            <a:r>
+              <a:t>Explain: The skill teaches correctness-first benchmark and claim discipline that applies across UXL projects.</a:t>
+            </a:r>
+          </a:p>
+          <a:p xmlns:a="http://schemas.openxmlformats.org/drawingml/2006/main">
+            <a:r>
+              <a:t>Emphasize: It does not replace each project's benchmark suite, approved metrics, or interpretation by performance owners.</a:t>
             </a:r>
           </a:p>
         </p:txBody>
@@ -628,7 +643,22 @@
           </a:p>
           <a:p xmlns:a="http://schemas.openxmlformats.org/drawingml/2006/main">
             <a:r>
-              <a:t>Speaker cue: What the skill tells an agent today</a:t>
+              <a:t>Presenter guidance</a:t>
+            </a:r>
+          </a:p>
+          <a:p xmlns:a="http://schemas.openxmlformats.org/drawingml/2006/main">
+            <a:r>
+              <a:t>Purpose: Explain the evidence order the skill expects.</a:t>
+            </a:r>
+          </a:p>
+          <a:p xmlns:a="http://schemas.openxmlformats.org/drawingml/2006/main">
+            <a:r>
+              <a:t>Explain: Define correctness, baseline, and timing scope; warm up and repeat; synchronize asynchronous work; report variance; profile only after a regression is established.</a:t>
+            </a:r>
+          </a:p>
+          <a:p xmlns:a="http://schemas.openxmlformats.org/drawingml/2006/main">
+            <a:r>
+              <a:t>Emphasize: A faster number is not useful unless the compared work and user-visible result are demonstrably equivalent.</a:t>
             </a:r>
           </a:p>
         </p:txBody>
@@ -738,7 +768,22 @@
           </a:p>
           <a:p xmlns:a="http://schemas.openxmlformats.org/drawingml/2006/main">
             <a:r>
-              <a:t>Speaker cue: Evaluation inventory: 4 implemented, 2 target gaps</a:t>
+              <a:t>Presenter guidance</a:t>
+            </a:r>
+          </a:p>
+          <a:p xmlns:a="http://schemas.openxmlformats.org/drawingml/2006/main">
+            <a:r>
+              <a:t>Purpose: Interpret the implemented and planned evaluation tasks.</a:t>
+            </a:r>
+          </a:p>
+          <a:p xmlns:a="http://schemas.openxmlformats.org/drawingml/2006/main">
+            <a:r>
+              <a:t>Explain: Four tasks exercise asynchronous timing, report repair, floating tolerance, and constrained concurrency; transfer-inclusive and profile-after-regression cases remain target-dependent gaps.</a:t>
+            </a:r>
+          </a:p>
+          <a:p xmlns:a="http://schemas.openxmlformats.org/drawingml/2006/main">
+            <a:r>
+              <a:t>Emphasize: The current tasks test evidence discipline, but none yet supports a broad claim that the skill improves performance work.</a:t>
             </a:r>
           </a:p>
         </p:txBody>
@@ -848,7 +893,22 @@
           </a:p>
           <a:p xmlns:a="http://schemas.openxmlformats.org/drawingml/2006/main">
             <a:r>
-              <a:t>Speaker cue: How we chose the content</a:t>
+              <a:t>Presenter guidance</a:t>
+            </a:r>
+          </a:p>
+          <a:p xmlns:a="http://schemas.openxmlformats.org/drawingml/2006/main">
+            <a:r>
+              <a:t>Purpose: Describe the design principles behind the content.</a:t>
+            </a:r>
+          </a:p>
+          <a:p xmlns:a="http://schemas.openxmlformats.org/drawingml/2006/main">
+            <a:r>
+              <a:t>Explain: Project-native tools stay authoritative while shared invariants—correctness, scope, synchronization, variance, provenance, and claim language—shape adversarial scenarios.</a:t>
+            </a:r>
+          </a:p>
+          <a:p xmlns:a="http://schemas.openxmlformats.org/drawingml/2006/main">
+            <a:r>
+              <a:t>Emphasize: Target-dependent gaps stay visible until qualified lanes and authentic regressions exist.</a:t>
             </a:r>
           </a:p>
         </p:txBody>
@@ -958,7 +1018,22 @@
           </a:p>
           <a:p xmlns:a="http://schemas.openxmlformats.org/drawingml/2006/main">
             <a:r>
-              <a:t>Speaker cue: What shared ownership would look like</a:t>
+              <a:t>Presenter guidance</a:t>
+            </a:r>
+          </a:p>
+          <a:p xmlns:a="http://schemas.openxmlformats.org/drawingml/2006/main">
+            <a:r>
+              <a:t>Purpose: Clarify ownership of performance guidance and evidence.</a:t>
+            </a:r>
+          </a:p>
+          <a:p xmlns:a="http://schemas.openxmlformats.org/drawingml/2006/main">
+            <a:r>
+              <a:t>Explain: Shared reviewers own the common evidence contract; project benchmark owners supply commands and interpretation limits; lane owners qualify environments; UXL maintains matched trials and artifacts.</a:t>
+            </a:r>
+          </a:p>
+          <a:p xmlns:a="http://schemas.openxmlformats.org/drawingml/2006/main">
+            <a:r>
+              <a:t>Emphasize: Hardware qualification proves the lane, not the value of the skill or the validity of a performance claim.</a:t>
             </a:r>
           </a:p>
         </p:txBody>
@@ -1068,7 +1143,22 @@
           </a:p>
           <a:p xmlns:a="http://schemas.openxmlformats.org/drawingml/2006/main">
             <a:r>
-              <a:t>Speaker cue: A focused 30-minute maintainer review</a:t>
+              <a:t>Presenter guidance</a:t>
+            </a:r>
+          </a:p>
+          <a:p xmlns:a="http://schemas.openxmlformats.org/drawingml/2006/main">
+            <a:r>
+              <a:t>Purpose: Conclude with a focused review request.</a:t>
+            </a:r>
+          </a:p>
+          <a:p xmlns:a="http://schemas.openxmlformats.org/drawingml/2006/main">
+            <a:r>
+              <a:t>Explain: Ask reviewers to confirm the evidence order, correct a benchmark assumption, judge the six tasks, and identify a shared owner.</a:t>
+            </a:r>
+          </a:p>
+          <a:p xmlns:a="http://schemas.openxmlformats.org/drawingml/2006/main">
+            <a:r>
+              <a:t>Emphasize: The goal is reproducible, narrowly scoped evidence before an agent makes any performance claim.</a:t>
             </a:r>
           </a:p>
         </p:txBody>
@@ -1104,7 +1194,7 @@
     <p:bg>
       <p:bgPr>
         <a:blipFill xmlns:a="http://schemas.openxmlformats.org/drawingml/2006/main">
-          <a:blip xmlns:r="http://schemas.openxmlformats.org/officeDocument/2006/relationships" r:embed="Rebfc6800060e45ff">
+          <a:blip xmlns:r="http://schemas.openxmlformats.org/officeDocument/2006/relationships" r:embed="Rcc8b597e322f49e9">
             <a:alphaModFix/>
           </a:blip>
           <a:stretch>
@@ -1539,7 +1629,7 @@
           <p:nvPr/>
         </p:nvPicPr>
         <p:blipFill rotWithShape="1">
-          <a:blip xmlns:r="http://schemas.openxmlformats.org/officeDocument/2006/relationships" xmlns:a="http://schemas.openxmlformats.org/drawingml/2006/main" r:embed="Ra35fd38994db4f04">
+          <a:blip xmlns:r="http://schemas.openxmlformats.org/officeDocument/2006/relationships" xmlns:a="http://schemas.openxmlformats.org/drawingml/2006/main" r:embed="R05b9b3aa051c4373">
             <a:alphaModFix/>
           </a:blip>
           <a:srcRect xmlns:a="http://schemas.openxmlformats.org/drawingml/2006/main" l="0" t="0" r="0" b="0"/>
@@ -1569,7 +1659,7 @@
     <p:bg>
       <p:bgPr>
         <a:blipFill xmlns:a="http://schemas.openxmlformats.org/drawingml/2006/main">
-          <a:blip xmlns:r="http://schemas.openxmlformats.org/officeDocument/2006/relationships" r:embed="R826b4208726f4e62">
+          <a:blip xmlns:r="http://schemas.openxmlformats.org/officeDocument/2006/relationships" r:embed="R954ec47ace014641">
             <a:alphaModFix/>
           </a:blip>
           <a:stretch>
@@ -2603,7 +2693,7 @@
           <p:nvPr/>
         </p:nvPicPr>
         <p:blipFill rotWithShape="1">
-          <a:blip xmlns:r="http://schemas.openxmlformats.org/officeDocument/2006/relationships" xmlns:a="http://schemas.openxmlformats.org/drawingml/2006/main" r:embed="Rcf45004576974d08">
+          <a:blip xmlns:r="http://schemas.openxmlformats.org/officeDocument/2006/relationships" xmlns:a="http://schemas.openxmlformats.org/drawingml/2006/main" r:embed="R90d228b5eabe429d">
             <a:alphaModFix/>
           </a:blip>
           <a:srcRect xmlns:a="http://schemas.openxmlformats.org/drawingml/2006/main" l="0" t="0" r="0" b="0"/>
@@ -3627,7 +3717,7 @@
           <p:nvPr/>
         </p:nvPicPr>
         <p:blipFill rotWithShape="1">
-          <a:blip xmlns:r="http://schemas.openxmlformats.org/officeDocument/2006/relationships" xmlns:a="http://schemas.openxmlformats.org/drawingml/2006/main" r:embed="Ra11fa2b0caf3447a">
+          <a:blip xmlns:r="http://schemas.openxmlformats.org/officeDocument/2006/relationships" xmlns:a="http://schemas.openxmlformats.org/drawingml/2006/main" r:embed="Redcb97401a3b40f3">
             <a:alphaModFix/>
           </a:blip>
           <a:srcRect xmlns:a="http://schemas.openxmlformats.org/drawingml/2006/main" l="0" t="0" r="0" b="0"/>
@@ -3657,7 +3747,7 @@
     <p:bg>
       <p:bgPr>
         <a:blipFill xmlns:a="http://schemas.openxmlformats.org/drawingml/2006/main">
-          <a:blip xmlns:r="http://schemas.openxmlformats.org/officeDocument/2006/relationships" r:embed="Raeecc6301de6478d">
+          <a:blip xmlns:r="http://schemas.openxmlformats.org/officeDocument/2006/relationships" r:embed="Ra0d4a9f83a264e0c">
             <a:alphaModFix/>
           </a:blip>
           <a:stretch>
@@ -4931,7 +5021,7 @@
           <p:nvPr/>
         </p:nvPicPr>
         <p:blipFill rotWithShape="1">
-          <a:blip xmlns:r="http://schemas.openxmlformats.org/officeDocument/2006/relationships" xmlns:a="http://schemas.openxmlformats.org/drawingml/2006/main" r:embed="R9753bee2c9074b41">
+          <a:blip xmlns:r="http://schemas.openxmlformats.org/officeDocument/2006/relationships" xmlns:a="http://schemas.openxmlformats.org/drawingml/2006/main" r:embed="Rb87818b6d99540d3">
             <a:alphaModFix/>
           </a:blip>
           <a:srcRect xmlns:a="http://schemas.openxmlformats.org/drawingml/2006/main" l="0" t="0" r="0" b="0"/>
@@ -8175,7 +8265,7 @@
           <p:nvPr/>
         </p:nvPicPr>
         <p:blipFill rotWithShape="1">
-          <a:blip xmlns:r="http://schemas.openxmlformats.org/officeDocument/2006/relationships" xmlns:a="http://schemas.openxmlformats.org/drawingml/2006/main" r:embed="Ra827efc87a314ea4">
+          <a:blip xmlns:r="http://schemas.openxmlformats.org/officeDocument/2006/relationships" xmlns:a="http://schemas.openxmlformats.org/drawingml/2006/main" r:embed="Ref7bf83cb96d4034">
             <a:alphaModFix/>
           </a:blip>
           <a:srcRect xmlns:a="http://schemas.openxmlformats.org/drawingml/2006/main" l="0" t="0" r="0" b="0"/>
@@ -9913,7 +10003,7 @@
           <p:nvPr/>
         </p:nvPicPr>
         <p:blipFill rotWithShape="1">
-          <a:blip xmlns:r="http://schemas.openxmlformats.org/officeDocument/2006/relationships" xmlns:a="http://schemas.openxmlformats.org/drawingml/2006/main" r:embed="Ra68211a7941742c3">
+          <a:blip xmlns:r="http://schemas.openxmlformats.org/officeDocument/2006/relationships" xmlns:a="http://schemas.openxmlformats.org/drawingml/2006/main" r:embed="Rf6b1258819104643">
             <a:alphaModFix/>
           </a:blip>
           <a:srcRect xmlns:a="http://schemas.openxmlformats.org/drawingml/2006/main" l="0" t="0" r="0" b="0"/>
@@ -16742,7 +16832,7 @@
     <p:bg>
       <p:bgPr>
         <a:blipFill xmlns:a="http://schemas.openxmlformats.org/drawingml/2006/main">
-          <a:blip xmlns:r="http://schemas.openxmlformats.org/officeDocument/2006/relationships" r:embed="R210492bfee494f94">
+          <a:blip xmlns:r="http://schemas.openxmlformats.org/officeDocument/2006/relationships" r:embed="Rd796c055db33434c">
             <a:alphaModFix/>
           </a:blip>
           <a:stretch>
@@ -17177,7 +17267,7 @@
           <p:nvPr/>
         </p:nvPicPr>
         <p:blipFill rotWithShape="1">
-          <a:blip xmlns:r="http://schemas.openxmlformats.org/officeDocument/2006/relationships" xmlns:a="http://schemas.openxmlformats.org/drawingml/2006/main" r:embed="Rb1b90555d83b46aa">
+          <a:blip xmlns:r="http://schemas.openxmlformats.org/officeDocument/2006/relationships" xmlns:a="http://schemas.openxmlformats.org/drawingml/2006/main" r:embed="Rf99301e749eb44c0">
             <a:alphaModFix/>
           </a:blip>
           <a:srcRect xmlns:a="http://schemas.openxmlformats.org/drawingml/2006/main" l="0" t="0" r="0" b="0"/>
@@ -17207,7 +17297,7 @@
     <p:bg>
       <p:bgPr>
         <a:blipFill xmlns:a="http://schemas.openxmlformats.org/drawingml/2006/main">
-          <a:blip xmlns:r="http://schemas.openxmlformats.org/officeDocument/2006/relationships" r:embed="Rb113f55924ff4c7e">
+          <a:blip xmlns:r="http://schemas.openxmlformats.org/officeDocument/2006/relationships" r:embed="Rba67c8963b84453f">
             <a:alphaModFix/>
           </a:blip>
           <a:stretch>
@@ -17840,7 +17930,7 @@
           <p:nvPr/>
         </p:nvPicPr>
         <p:blipFill rotWithShape="1">
-          <a:blip xmlns:r="http://schemas.openxmlformats.org/officeDocument/2006/relationships" xmlns:a="http://schemas.openxmlformats.org/drawingml/2006/main" r:embed="R0fec7f323de64d44">
+          <a:blip xmlns:r="http://schemas.openxmlformats.org/officeDocument/2006/relationships" xmlns:a="http://schemas.openxmlformats.org/drawingml/2006/main" r:embed="Rac2db4c5efc74d5c">
             <a:alphaModFix/>
           </a:blip>
           <a:srcRect xmlns:a="http://schemas.openxmlformats.org/drawingml/2006/main" l="0" t="0" r="0" b="0"/>
@@ -18300,7 +18390,7 @@
     <p:bg>
       <p:bgPr>
         <a:blipFill xmlns:a="http://schemas.openxmlformats.org/drawingml/2006/main">
-          <a:blip xmlns:r="http://schemas.openxmlformats.org/officeDocument/2006/relationships" r:embed="R4e23119ac56b4d2c">
+          <a:blip xmlns:r="http://schemas.openxmlformats.org/officeDocument/2006/relationships" r:embed="R9ca37eacd9714409">
             <a:alphaModFix/>
           </a:blip>
           <a:stretch>
@@ -18933,7 +19023,7 @@
           <p:nvPr/>
         </p:nvPicPr>
         <p:blipFill rotWithShape="1">
-          <a:blip xmlns:r="http://schemas.openxmlformats.org/officeDocument/2006/relationships" xmlns:a="http://schemas.openxmlformats.org/drawingml/2006/main" r:embed="R655399793cfe4a02">
+          <a:blip xmlns:r="http://schemas.openxmlformats.org/officeDocument/2006/relationships" xmlns:a="http://schemas.openxmlformats.org/drawingml/2006/main" r:embed="R5b35ffaf1b864a22">
             <a:alphaModFix/>
           </a:blip>
           <a:srcRect xmlns:a="http://schemas.openxmlformats.org/drawingml/2006/main" l="0" t="0" r="0" b="0"/>
@@ -21589,7 +21679,7 @@
           <p:nvPr/>
         </p:nvPicPr>
         <p:blipFill rotWithShape="1">
-          <a:blip xmlns:r="http://schemas.openxmlformats.org/officeDocument/2006/relationships" xmlns:a="http://schemas.openxmlformats.org/drawingml/2006/main" r:embed="R0b3487bb52f64b31">
+          <a:blip xmlns:r="http://schemas.openxmlformats.org/officeDocument/2006/relationships" xmlns:a="http://schemas.openxmlformats.org/drawingml/2006/main" r:embed="Ra5f8058c41ea4d68">
             <a:alphaModFix/>
           </a:blip>
           <a:srcRect xmlns:a="http://schemas.openxmlformats.org/drawingml/2006/main" l="0" t="0" r="0" b="0"/>
@@ -21619,7 +21709,7 @@
     <p:bg>
       <p:bgPr>
         <a:blipFill xmlns:a="http://schemas.openxmlformats.org/drawingml/2006/main">
-          <a:blip xmlns:r="http://schemas.openxmlformats.org/officeDocument/2006/relationships" r:embed="Rcb79d993f9e24bc8">
+          <a:blip xmlns:r="http://schemas.openxmlformats.org/officeDocument/2006/relationships" r:embed="R4c63e5d09b594ddb">
             <a:alphaModFix/>
           </a:blip>
           <a:stretch>
@@ -22463,7 +22553,7 @@
           <p:nvPr/>
         </p:nvPicPr>
         <p:blipFill rotWithShape="1">
-          <a:blip xmlns:r="http://schemas.openxmlformats.org/officeDocument/2006/relationships" xmlns:a="http://schemas.openxmlformats.org/drawingml/2006/main" r:embed="Rb0a27fc98b044368">
+          <a:blip xmlns:r="http://schemas.openxmlformats.org/officeDocument/2006/relationships" xmlns:a="http://schemas.openxmlformats.org/drawingml/2006/main" r:embed="Re604d2cd3afb4ee8">
             <a:alphaModFix/>
           </a:blip>
           <a:srcRect xmlns:a="http://schemas.openxmlformats.org/drawingml/2006/main" l="0" t="0" r="0" b="0"/>
@@ -22493,7 +22583,7 @@
     <p:bg>
       <p:bgPr>
         <a:blipFill xmlns:a="http://schemas.openxmlformats.org/drawingml/2006/main">
-          <a:blip xmlns:r="http://schemas.openxmlformats.org/officeDocument/2006/relationships" r:embed="R48dc806bd0514e65">
+          <a:blip xmlns:r="http://schemas.openxmlformats.org/officeDocument/2006/relationships" r:embed="Rb55b19f331354e8f">
             <a:alphaModFix/>
           </a:blip>
           <a:stretch>
@@ -23441,7 +23531,7 @@
           <p:nvPr/>
         </p:nvPicPr>
         <p:blipFill rotWithShape="1">
-          <a:blip xmlns:r="http://schemas.openxmlformats.org/officeDocument/2006/relationships" xmlns:a="http://schemas.openxmlformats.org/drawingml/2006/main" r:embed="Rff0ae30f75eb43ad">
+          <a:blip xmlns:r="http://schemas.openxmlformats.org/officeDocument/2006/relationships" xmlns:a="http://schemas.openxmlformats.org/drawingml/2006/main" r:embed="R7ff8ccc03309453d">
             <a:alphaModFix/>
           </a:blip>
           <a:srcRect xmlns:a="http://schemas.openxmlformats.org/drawingml/2006/main" l="0" t="0" r="0" b="0"/>
@@ -23471,7 +23561,7 @@
     <p:bg>
       <p:bgPr>
         <a:blipFill xmlns:a="http://schemas.openxmlformats.org/drawingml/2006/main">
-          <a:blip xmlns:r="http://schemas.openxmlformats.org/officeDocument/2006/relationships" r:embed="R32afa448c4374c88">
+          <a:blip xmlns:r="http://schemas.openxmlformats.org/officeDocument/2006/relationships" r:embed="R004c3bc3a7924890">
             <a:alphaModFix/>
           </a:blip>
           <a:stretch>
@@ -23932,7 +24022,7 @@
           <p:nvPr/>
         </p:nvPicPr>
         <p:blipFill rotWithShape="1">
-          <a:blip xmlns:r="http://schemas.openxmlformats.org/officeDocument/2006/relationships" xmlns:a="http://schemas.openxmlformats.org/drawingml/2006/main" r:embed="R3902d30833a24cba">
+          <a:blip xmlns:r="http://schemas.openxmlformats.org/officeDocument/2006/relationships" xmlns:a="http://schemas.openxmlformats.org/drawingml/2006/main" r:embed="Ra162283e02384ffe">
             <a:alphaModFix/>
           </a:blip>
           <a:srcRect xmlns:a="http://schemas.openxmlformats.org/drawingml/2006/main" l="0" t="0" r="0" b="0"/>
@@ -25644,22 +25734,22 @@
   </p:cSld>
   <p:clrMap bg1="lt1" tx1="dk1" bg2="dk2" tx2="lt2" accent1="accent1" accent2="accent2" accent3="accent3" accent4="accent4" accent5="accent5" accent6="accent6" hlink="hlink" folHlink="folHlink"/>
   <p:sldLayoutIdLst>
-    <p:sldLayoutId xmlns:r="http://schemas.openxmlformats.org/officeDocument/2006/relationships" id="2147483649" r:id="R94507f8ee73d44af"/>
-    <p:sldLayoutId xmlns:r="http://schemas.openxmlformats.org/officeDocument/2006/relationships" id="2147483650" r:id="Rc51c48a8765a4c2f"/>
-    <p:sldLayoutId xmlns:r="http://schemas.openxmlformats.org/officeDocument/2006/relationships" id="2147483651" r:id="R48096b092a174dba"/>
-    <p:sldLayoutId xmlns:r="http://schemas.openxmlformats.org/officeDocument/2006/relationships" id="2147483652" r:id="R8f51d2054bb04e06"/>
-    <p:sldLayoutId xmlns:r="http://schemas.openxmlformats.org/officeDocument/2006/relationships" id="2147483653" r:id="R40f56d31089f4386"/>
-    <p:sldLayoutId xmlns:r="http://schemas.openxmlformats.org/officeDocument/2006/relationships" id="2147483654" r:id="R1d7b2e42fe1147af"/>
-    <p:sldLayoutId xmlns:r="http://schemas.openxmlformats.org/officeDocument/2006/relationships" id="2147483655" r:id="Rab7704a50261401c"/>
-    <p:sldLayoutId xmlns:r="http://schemas.openxmlformats.org/officeDocument/2006/relationships" id="2147483656" r:id="R6fbb2d74e4c3466c"/>
-    <p:sldLayoutId xmlns:r="http://schemas.openxmlformats.org/officeDocument/2006/relationships" id="2147483657" r:id="Re373aba6ebd944c1"/>
-    <p:sldLayoutId xmlns:r="http://schemas.openxmlformats.org/officeDocument/2006/relationships" id="2147483658" r:id="R0b6b6f726669456e"/>
-    <p:sldLayoutId xmlns:r="http://schemas.openxmlformats.org/officeDocument/2006/relationships" id="2147483659" r:id="R2f82e78f10614bc2"/>
-    <p:sldLayoutId xmlns:r="http://schemas.openxmlformats.org/officeDocument/2006/relationships" id="2147483660" r:id="Re6d0719ae8ee4e95"/>
-    <p:sldLayoutId xmlns:r="http://schemas.openxmlformats.org/officeDocument/2006/relationships" id="2147483661" r:id="R4b9e7e6548ce42c3"/>
-    <p:sldLayoutId xmlns:r="http://schemas.openxmlformats.org/officeDocument/2006/relationships" id="2147483662" r:id="R38e874b245d34c67"/>
-    <p:sldLayoutId xmlns:r="http://schemas.openxmlformats.org/officeDocument/2006/relationships" id="2147483663" r:id="Rbc39e0ae0e1b49b1"/>
-    <p:sldLayoutId xmlns:r="http://schemas.openxmlformats.org/officeDocument/2006/relationships" id="2147483664" r:id="R779cbce639454cbb"/>
+    <p:sldLayoutId xmlns:r="http://schemas.openxmlformats.org/officeDocument/2006/relationships" id="2147483649" r:id="R4c16d5ae546849ea"/>
+    <p:sldLayoutId xmlns:r="http://schemas.openxmlformats.org/officeDocument/2006/relationships" id="2147483650" r:id="R7bf798aad6a8453b"/>
+    <p:sldLayoutId xmlns:r="http://schemas.openxmlformats.org/officeDocument/2006/relationships" id="2147483651" r:id="R225366d2917541d5"/>
+    <p:sldLayoutId xmlns:r="http://schemas.openxmlformats.org/officeDocument/2006/relationships" id="2147483652" r:id="Rbc40cbf1c26945f3"/>
+    <p:sldLayoutId xmlns:r="http://schemas.openxmlformats.org/officeDocument/2006/relationships" id="2147483653" r:id="R0e43a13860ef4ba7"/>
+    <p:sldLayoutId xmlns:r="http://schemas.openxmlformats.org/officeDocument/2006/relationships" id="2147483654" r:id="R6a3b7ad662194746"/>
+    <p:sldLayoutId xmlns:r="http://schemas.openxmlformats.org/officeDocument/2006/relationships" id="2147483655" r:id="Rf289b8de279846d2"/>
+    <p:sldLayoutId xmlns:r="http://schemas.openxmlformats.org/officeDocument/2006/relationships" id="2147483656" r:id="R82512e48607c4e2e"/>
+    <p:sldLayoutId xmlns:r="http://schemas.openxmlformats.org/officeDocument/2006/relationships" id="2147483657" r:id="R506663db5dc446fc"/>
+    <p:sldLayoutId xmlns:r="http://schemas.openxmlformats.org/officeDocument/2006/relationships" id="2147483658" r:id="R7b855d34fffc4208"/>
+    <p:sldLayoutId xmlns:r="http://schemas.openxmlformats.org/officeDocument/2006/relationships" id="2147483659" r:id="Rfa3281151206416a"/>
+    <p:sldLayoutId xmlns:r="http://schemas.openxmlformats.org/officeDocument/2006/relationships" id="2147483660" r:id="Rf3d7b93b6d724d05"/>
+    <p:sldLayoutId xmlns:r="http://schemas.openxmlformats.org/officeDocument/2006/relationships" id="2147483661" r:id="Rd0bb4f0dda314428"/>
+    <p:sldLayoutId xmlns:r="http://schemas.openxmlformats.org/officeDocument/2006/relationships" id="2147483662" r:id="Rf699128381334447"/>
+    <p:sldLayoutId xmlns:r="http://schemas.openxmlformats.org/officeDocument/2006/relationships" id="2147483663" r:id="Rcdeea891e7e24ba0"/>
+    <p:sldLayoutId xmlns:r="http://schemas.openxmlformats.org/officeDocument/2006/relationships" id="2147483664" r:id="R212f56a6093d4114"/>
   </p:sldLayoutIdLst>
   <p:hf hdr="0" ftr="0" dt="0"/>
   <p:txStyles>
@@ -27852,7 +27942,7 @@
           <p:nvPr/>
         </p:nvPicPr>
         <p:blipFill rotWithShape="1">
-          <a:blip xmlns:r="http://schemas.openxmlformats.org/officeDocument/2006/relationships" xmlns:a="http://schemas.openxmlformats.org/drawingml/2006/main" r:embed="Rf68a075a200e42df">
+          <a:blip xmlns:r="http://schemas.openxmlformats.org/officeDocument/2006/relationships" xmlns:a="http://schemas.openxmlformats.org/drawingml/2006/main" r:embed="R6e017cc35fd64b08">
             <a:alphaModFix/>
           </a:blip>
           <a:srcRect xmlns:a="http://schemas.openxmlformats.org/drawingml/2006/main" l="0" t="0" r="0" b="0"/>
@@ -27875,19 +27965,19 @@
   </p:cSld>
   <p:clrMap bg1="lt1" tx1="dk1" bg2="dk2" tx2="lt2" accent1="accent1" accent2="accent2" accent3="accent3" accent4="accent4" accent5="accent5" accent6="accent6" hlink="hlink" folHlink="folHlink"/>
   <p:sldLayoutIdLst>
-    <p:sldLayoutId xmlns:r="http://schemas.openxmlformats.org/officeDocument/2006/relationships" id="2147483666" r:id="Rc1ed23cdc8d14dad"/>
-    <p:sldLayoutId xmlns:r="http://schemas.openxmlformats.org/officeDocument/2006/relationships" id="2147483667" r:id="Rffb82c0640084ec2"/>
-    <p:sldLayoutId xmlns:r="http://schemas.openxmlformats.org/officeDocument/2006/relationships" id="2147483668" r:id="Rf602d74d8c1b4f7e"/>
-    <p:sldLayoutId xmlns:r="http://schemas.openxmlformats.org/officeDocument/2006/relationships" id="2147483669" r:id="Re7f66cc8b2c2413b"/>
-    <p:sldLayoutId xmlns:r="http://schemas.openxmlformats.org/officeDocument/2006/relationships" id="2147483670" r:id="R5acd52313d374c93"/>
-    <p:sldLayoutId xmlns:r="http://schemas.openxmlformats.org/officeDocument/2006/relationships" id="2147483671" r:id="R0afa2f8ada6e47f4"/>
-    <p:sldLayoutId xmlns:r="http://schemas.openxmlformats.org/officeDocument/2006/relationships" id="2147483672" r:id="R84044ed7f22d487c"/>
-    <p:sldLayoutId xmlns:r="http://schemas.openxmlformats.org/officeDocument/2006/relationships" id="2147483673" r:id="R0c2ee317979645e2"/>
-    <p:sldLayoutId xmlns:r="http://schemas.openxmlformats.org/officeDocument/2006/relationships" id="2147483674" r:id="Rdb4a22f1179f40cb"/>
-    <p:sldLayoutId xmlns:r="http://schemas.openxmlformats.org/officeDocument/2006/relationships" id="2147483675" r:id="R79cae61ba8a84484"/>
-    <p:sldLayoutId xmlns:r="http://schemas.openxmlformats.org/officeDocument/2006/relationships" id="2147483676" r:id="Rd35f3cefae9841b1"/>
-    <p:sldLayoutId xmlns:r="http://schemas.openxmlformats.org/officeDocument/2006/relationships" id="2147483677" r:id="R81107fe299e147e7"/>
-    <p:sldLayoutId xmlns:r="http://schemas.openxmlformats.org/officeDocument/2006/relationships" id="2147483678" r:id="Rbff2c8227e3f48c8"/>
+    <p:sldLayoutId xmlns:r="http://schemas.openxmlformats.org/officeDocument/2006/relationships" id="2147483666" r:id="R31de88c8799e40b7"/>
+    <p:sldLayoutId xmlns:r="http://schemas.openxmlformats.org/officeDocument/2006/relationships" id="2147483667" r:id="Rf653bc1988894616"/>
+    <p:sldLayoutId xmlns:r="http://schemas.openxmlformats.org/officeDocument/2006/relationships" id="2147483668" r:id="R6364e82cdf694a83"/>
+    <p:sldLayoutId xmlns:r="http://schemas.openxmlformats.org/officeDocument/2006/relationships" id="2147483669" r:id="R9ce082380ede48ac"/>
+    <p:sldLayoutId xmlns:r="http://schemas.openxmlformats.org/officeDocument/2006/relationships" id="2147483670" r:id="Rf031b00929aa4a46"/>
+    <p:sldLayoutId xmlns:r="http://schemas.openxmlformats.org/officeDocument/2006/relationships" id="2147483671" r:id="Rcbca3bea47b24493"/>
+    <p:sldLayoutId xmlns:r="http://schemas.openxmlformats.org/officeDocument/2006/relationships" id="2147483672" r:id="Rc407b77f01ba46b4"/>
+    <p:sldLayoutId xmlns:r="http://schemas.openxmlformats.org/officeDocument/2006/relationships" id="2147483673" r:id="R0ab7e26e0cb64ddf"/>
+    <p:sldLayoutId xmlns:r="http://schemas.openxmlformats.org/officeDocument/2006/relationships" id="2147483674" r:id="R8603987ff1a0424b"/>
+    <p:sldLayoutId xmlns:r="http://schemas.openxmlformats.org/officeDocument/2006/relationships" id="2147483675" r:id="R95715d14f6e44f08"/>
+    <p:sldLayoutId xmlns:r="http://schemas.openxmlformats.org/officeDocument/2006/relationships" id="2147483676" r:id="R7501a8b0b19948c0"/>
+    <p:sldLayoutId xmlns:r="http://schemas.openxmlformats.org/officeDocument/2006/relationships" id="2147483677" r:id="R9e457d28034b4f68"/>
+    <p:sldLayoutId xmlns:r="http://schemas.openxmlformats.org/officeDocument/2006/relationships" id="2147483678" r:id="Rbd74faa4f2d745f5"/>
   </p:sldLayoutIdLst>
   <p:hf hdr="0" ftr="0" dt="0"/>
   <p:txStyles>
